--- a/11/ppt/11-1_서비스가_데이터를_기억하는_과정_v1.pptx
+++ b/11/ppt/11-1_서비스가_데이터를_기억하는_과정_v1.pptx
@@ -2632,20 +2632,44 @@
           </a:p>
         </p:txBody>
       </p:sp>
-      <p:sp>
-        <p:nvSpPr>
-          <p:cNvPr id="10" name="Shape 8"/>
-          <p:cNvSpPr/>
-          <p:nvPr/>
-        </p:nvSpPr>
-        <p:spPr>
-          <a:xfrm>
-            <a:off x="530352" y="2194560"/>
-            <a:ext cx="11128248" cy="1371600"/>
+      <p:pic>
+        <p:nvPicPr>
+          <p:cNvPr id="10" name="Image 0" descr="/home/claude/w5/교과서_배포/assets/img/11-1-01-vanished.png">    </p:cNvPr>
+          <p:cNvPicPr>
+            <a:picLocks noChangeAspect="1"/>
+          </p:cNvPicPr>
+          <p:nvPr/>
+        </p:nvPicPr>
+        <p:blipFill>
+          <a:blip r:embed="rId1"/>
+          <a:stretch>
+            <a:fillRect/>
+          </a:stretch>
+        </p:blipFill>
+        <p:spPr>
+          <a:xfrm>
+            <a:off x="941832" y="2011680"/>
+            <a:ext cx="5852160" cy="3291840"/>
+          </a:xfrm>
+          <a:prstGeom prst="rect">
+            <a:avLst/>
+          </a:prstGeom>
+        </p:spPr>
+      </p:pic>
+      <p:sp>
+        <p:nvSpPr>
+          <p:cNvPr id="11" name="Shape 8"/>
+          <p:cNvSpPr/>
+          <p:nvPr/>
+        </p:nvSpPr>
+        <p:spPr>
+          <a:xfrm>
+            <a:off x="7461504" y="2011680"/>
+            <a:ext cx="4389120" cy="1572768"/>
           </a:xfrm>
           <a:prstGeom prst="roundRect">
             <a:avLst>
-              <a:gd name="adj" fmla="val 3333"/>
+              <a:gd name="adj" fmla="val 2907"/>
             </a:avLst>
           </a:prstGeom>
           <a:solidFill>
@@ -2656,14 +2680,14 @@
       </p:sp>
       <p:sp>
         <p:nvSpPr>
-          <p:cNvPr id="11" name="Text 9"/>
-          <p:cNvSpPr/>
-          <p:nvPr/>
-        </p:nvSpPr>
-        <p:spPr>
-          <a:xfrm>
-            <a:off x="768096" y="2377440"/>
-            <a:ext cx="10652760" cy="1005840"/>
+          <p:cNvPr id="12" name="Text 9"/>
+          <p:cNvSpPr/>
+          <p:nvPr/>
+        </p:nvSpPr>
+        <p:spPr>
+          <a:xfrm>
+            <a:off x="7699248" y="2194560"/>
+            <a:ext cx="3913632" cy="1207008"/>
           </a:xfrm>
           <a:prstGeom prst="rect">
             <a:avLst/>
@@ -2677,12 +2701,12 @@
           <a:p>
             <a:pPr indent="0" marL="0">
               <a:lnSpc>
-                <a:spcPts val="2720"/>
+                <a:spcPts val="2210"/>
               </a:lnSpc>
               <a:buNone/>
             </a:pPr>
             <a:r>
-              <a:rPr lang="en-US" sz="1600" b="1" dirty="0">
+              <a:rPr lang="en-US" sz="1300" b="1" dirty="0">
                 <a:solidFill>
                   <a:srgbClr val="E8EAED"/>
                 </a:solidFill>
@@ -2690,28 +2714,28 @@
                 <a:ea typeface="IBM Plex Mono" pitchFamily="34" charset="-122"/>
                 <a:cs typeface="IBM Plex Mono" pitchFamily="34" charset="-120"/>
               </a:rPr>
-              <a:t>결과를 확인한다  →  화면을 새로 연다  →  ?</a:t>
-            </a:r>
-            <a:endParaRPr lang="en-US" sz="1600" dirty="0"/>
+              <a:t>화면을 새로 연다  →  ?</a:t>
+            </a:r>
+            <a:endParaRPr lang="en-US" sz="1300" dirty="0"/>
           </a:p>
           <a:p>
             <a:pPr indent="0" marL="0">
               <a:lnSpc>
-                <a:spcPts val="2720"/>
+                <a:spcPts val="2210"/>
               </a:lnSpc>
               <a:buNone/>
             </a:pPr>
-            <a:endParaRPr lang="en-US" sz="1600" dirty="0"/>
+            <a:endParaRPr lang="en-US" sz="1300" dirty="0"/>
           </a:p>
           <a:p>
             <a:pPr indent="0" marL="0">
               <a:lnSpc>
-                <a:spcPts val="2720"/>
+                <a:spcPts val="2210"/>
               </a:lnSpc>
               <a:buNone/>
             </a:pPr>
             <a:r>
-              <a:rPr lang="en-US" sz="1600" b="1" dirty="0">
+              <a:rPr lang="en-US" sz="1300" b="1" dirty="0">
                 <a:solidFill>
                   <a:srgbClr val="E8EAED"/>
                 </a:solidFill>
@@ -2719,21 +2743,129 @@
                 <a:ea typeface="IBM Plex Mono" pitchFamily="34" charset="-122"/>
                 <a:cs typeface="IBM Plex Mono" pitchFamily="34" charset="-120"/>
               </a:rPr>
-              <a:t>                 서비스를 껐다 다시 연다  →  ?</a:t>
-            </a:r>
-            <a:endParaRPr lang="en-US" sz="1600" dirty="0"/>
-          </a:p>
-        </p:txBody>
-      </p:sp>
-      <p:sp>
-        <p:nvSpPr>
-          <p:cNvPr id="12" name="Shape 10"/>
-          <p:cNvSpPr/>
-          <p:nvPr/>
-        </p:nvSpPr>
-        <p:spPr>
-          <a:xfrm>
-            <a:off x="530352" y="3840480"/>
+              <a:t>껐다 다시 연다  →  ?</a:t>
+            </a:r>
+            <a:endParaRPr lang="en-US" sz="1300" dirty="0"/>
+          </a:p>
+        </p:txBody>
+      </p:sp>
+      <p:sp>
+        <p:nvSpPr>
+          <p:cNvPr id="13" name="Shape 10"/>
+          <p:cNvSpPr/>
+          <p:nvPr/>
+        </p:nvSpPr>
+        <p:spPr>
+          <a:xfrm>
+            <a:off x="7461504" y="3730752"/>
+            <a:ext cx="4389120" cy="1572768"/>
+          </a:xfrm>
+          <a:prstGeom prst="roundRect">
+            <a:avLst>
+              <a:gd name="adj" fmla="val 3198"/>
+            </a:avLst>
+          </a:prstGeom>
+          <a:solidFill>
+            <a:srgbClr val="E7F2ED"/>
+          </a:solidFill>
+          <a:ln w="12700">
+            <a:solidFill>
+              <a:srgbClr val="0E7C86"/>
+            </a:solidFill>
+            <a:prstDash val="solid"/>
+          </a:ln>
+        </p:spPr>
+      </p:sp>
+      <p:sp>
+        <p:nvSpPr>
+          <p:cNvPr id="14" name="Text 11"/>
+          <p:cNvSpPr/>
+          <p:nvPr/>
+        </p:nvSpPr>
+        <p:spPr>
+          <a:xfrm>
+            <a:off x="7644384" y="3895344"/>
+            <a:ext cx="4023360" cy="402336"/>
+          </a:xfrm>
+          <a:prstGeom prst="rect">
+            <a:avLst/>
+          </a:prstGeom>
+          <a:noFill/>
+          <a:ln/>
+        </p:spPr>
+        <p:txBody>
+          <a:bodyPr wrap="square" lIns="0" tIns="0" rIns="0" bIns="0" rtlCol="0" anchor="ctr"/>
+          <a:lstStyle/>
+          <a:p>
+            <a:pPr indent="0" marL="0">
+              <a:buNone/>
+            </a:pPr>
+            <a:r>
+              <a:rPr lang="en-US" sz="1650" b="1" dirty="0">
+                <a:solidFill>
+                  <a:srgbClr val="1B1D21"/>
+                </a:solidFill>
+                <a:latin typeface="IBM Plex Sans KR" pitchFamily="34" charset="0"/>
+                <a:ea typeface="IBM Plex Sans KR" pitchFamily="34" charset="-122"/>
+                <a:cs typeface="IBM Plex Sans KR" pitchFamily="34" charset="-120"/>
+              </a:rPr>
+              <a:t>이번 프로젝트의 조건</a:t>
+            </a:r>
+            <a:endParaRPr lang="en-US" sz="1650" dirty="0"/>
+          </a:p>
+        </p:txBody>
+      </p:sp>
+      <p:sp>
+        <p:nvSpPr>
+          <p:cNvPr id="15" name="Text 12"/>
+          <p:cNvSpPr/>
+          <p:nvPr/>
+        </p:nvSpPr>
+        <p:spPr>
+          <a:xfrm>
+            <a:off x="7644384" y="4389120"/>
+            <a:ext cx="4023360" cy="768096"/>
+          </a:xfrm>
+          <a:prstGeom prst="rect">
+            <a:avLst/>
+          </a:prstGeom>
+          <a:noFill/>
+          <a:ln/>
+        </p:spPr>
+        <p:txBody>
+          <a:bodyPr wrap="square" lIns="0" tIns="0" rIns="0" bIns="0" rtlCol="0" anchor="t"/>
+          <a:lstStyle/>
+          <a:p>
+            <a:pPr indent="0" marL="0">
+              <a:lnSpc>
+                <a:spcPts val="1900"/>
+              </a:lnSpc>
+              <a:buNone/>
+            </a:pPr>
+            <a:r>
+              <a:rPr lang="en-US" sz="1250" dirty="0">
+                <a:solidFill>
+                  <a:srgbClr val="34373D"/>
+                </a:solidFill>
+                <a:latin typeface="IBM Plex Sans KR" pitchFamily="34" charset="0"/>
+                <a:ea typeface="IBM Plex Sans KR" pitchFamily="34" charset="-122"/>
+                <a:cs typeface="IBM Plex Sans KR" pitchFamily="34" charset="-120"/>
+              </a:rPr>
+              <a:t>핵심 기능과 관련된 기록을 하나 이상 남긴다. 하나면 충분하다.</a:t>
+            </a:r>
+            <a:endParaRPr lang="en-US" sz="1250" dirty="0"/>
+          </a:p>
+        </p:txBody>
+      </p:sp>
+      <p:sp>
+        <p:nvSpPr>
+          <p:cNvPr id="16" name="Shape 13"/>
+          <p:cNvSpPr/>
+          <p:nvPr/>
+        </p:nvSpPr>
+        <p:spPr>
+          <a:xfrm>
+            <a:off x="530352" y="5486400"/>
             <a:ext cx="11128248" cy="512064"/>
           </a:xfrm>
           <a:prstGeom prst="roundRect">
@@ -2754,13 +2886,13 @@
       </p:sp>
       <p:sp>
         <p:nvSpPr>
-          <p:cNvPr id="13" name="Text 11"/>
-          <p:cNvSpPr/>
-          <p:nvPr/>
-        </p:nvSpPr>
-        <p:spPr>
-          <a:xfrm>
-            <a:off x="731520" y="3840480"/>
+          <p:cNvPr id="17" name="Text 14"/>
+          <p:cNvSpPr/>
+          <p:nvPr/>
+        </p:nvSpPr>
+        <p:spPr>
+          <a:xfrm>
+            <a:off x="731520" y="5486400"/>
             <a:ext cx="10725912" cy="512064"/>
           </a:xfrm>
           <a:prstGeom prst="rect">
@@ -2777,7 +2909,7 @@
               <a:buNone/>
             </a:pPr>
             <a:r>
-              <a:rPr lang="en-US" sz="1600" b="1" dirty="0">
+              <a:rPr lang="en-US" sz="1500" b="1" dirty="0">
                 <a:solidFill>
                   <a:srgbClr val="FFFFFF"/>
                 </a:solidFill>
@@ -2787,115 +2919,7 @@
               </a:rPr>
               <a:t>지금 화면에 보인다고 나중에도 남는 것은 아니다</a:t>
             </a:r>
-            <a:endParaRPr lang="en-US" sz="1600" dirty="0"/>
-          </a:p>
-        </p:txBody>
-      </p:sp>
-      <p:sp>
-        <p:nvSpPr>
-          <p:cNvPr id="14" name="Shape 12"/>
-          <p:cNvSpPr/>
-          <p:nvPr/>
-        </p:nvSpPr>
-        <p:spPr>
-          <a:xfrm>
-            <a:off x="1737360" y="4663440"/>
-            <a:ext cx="8686800" cy="1417320"/>
-          </a:xfrm>
-          <a:prstGeom prst="roundRect">
-            <a:avLst>
-              <a:gd name="adj" fmla="val 3548"/>
-            </a:avLst>
-          </a:prstGeom>
-          <a:solidFill>
-            <a:srgbClr val="E7F2ED"/>
-          </a:solidFill>
-          <a:ln w="12700">
-            <a:solidFill>
-              <a:srgbClr val="0E7C86"/>
-            </a:solidFill>
-            <a:prstDash val="solid"/>
-          </a:ln>
-        </p:spPr>
-      </p:sp>
-      <p:sp>
-        <p:nvSpPr>
-          <p:cNvPr id="15" name="Text 13"/>
-          <p:cNvSpPr/>
-          <p:nvPr/>
-        </p:nvSpPr>
-        <p:spPr>
-          <a:xfrm>
-            <a:off x="1920240" y="4828032"/>
-            <a:ext cx="8321040" cy="402336"/>
-          </a:xfrm>
-          <a:prstGeom prst="rect">
-            <a:avLst/>
-          </a:prstGeom>
-          <a:noFill/>
-          <a:ln/>
-        </p:spPr>
-        <p:txBody>
-          <a:bodyPr wrap="square" lIns="0" tIns="0" rIns="0" bIns="0" rtlCol="0" anchor="ctr"/>
-          <a:lstStyle/>
-          <a:p>
-            <a:pPr indent="0" marL="0">
-              <a:buNone/>
-            </a:pPr>
-            <a:r>
-              <a:rPr lang="en-US" sz="1650" b="1" dirty="0">
-                <a:solidFill>
-                  <a:srgbClr val="1B1D21"/>
-                </a:solidFill>
-                <a:latin typeface="IBM Plex Sans KR" pitchFamily="34" charset="0"/>
-                <a:ea typeface="IBM Plex Sans KR" pitchFamily="34" charset="-122"/>
-                <a:cs typeface="IBM Plex Sans KR" pitchFamily="34" charset="-120"/>
-              </a:rPr>
-              <a:t>이번 프로젝트의 조건</a:t>
-            </a:r>
-            <a:endParaRPr lang="en-US" sz="1650" dirty="0"/>
-          </a:p>
-        </p:txBody>
-      </p:sp>
-      <p:sp>
-        <p:nvSpPr>
-          <p:cNvPr id="16" name="Text 14"/>
-          <p:cNvSpPr/>
-          <p:nvPr/>
-        </p:nvSpPr>
-        <p:spPr>
-          <a:xfrm>
-            <a:off x="1920240" y="5321808"/>
-            <a:ext cx="8321040" cy="612648"/>
-          </a:xfrm>
-          <a:prstGeom prst="rect">
-            <a:avLst/>
-          </a:prstGeom>
-          <a:noFill/>
-          <a:ln/>
-        </p:spPr>
-        <p:txBody>
-          <a:bodyPr wrap="square" lIns="0" tIns="0" rIns="0" bIns="0" rtlCol="0" anchor="t"/>
-          <a:lstStyle/>
-          <a:p>
-            <a:pPr indent="0" marL="0">
-              <a:lnSpc>
-                <a:spcPts val="1900"/>
-              </a:lnSpc>
-              <a:buNone/>
-            </a:pPr>
-            <a:r>
-              <a:rPr lang="en-US" sz="1350" dirty="0">
-                <a:solidFill>
-                  <a:srgbClr val="34373D"/>
-                </a:solidFill>
-                <a:latin typeface="IBM Plex Sans KR" pitchFamily="34" charset="0"/>
-                <a:ea typeface="IBM Plex Sans KR" pitchFamily="34" charset="-122"/>
-                <a:cs typeface="IBM Plex Sans KR" pitchFamily="34" charset="-120"/>
-              </a:rPr>
-              <a:t>모든 서비스가 핵심 기능과 관련된 기록을 하나 이상 남긴다. 하나면 충분하다.</a:t>
-            </a:r>
-            <a:endParaRPr lang="en-US" sz="1350" dirty="0"/>
+            <a:endParaRPr lang="en-US" sz="1500" dirty="0"/>
           </a:p>
         </p:txBody>
       </p:sp>
@@ -5299,20 +5323,44 @@
           </a:p>
         </p:txBody>
       </p:sp>
-      <p:sp>
-        <p:nvSpPr>
-          <p:cNvPr id="10" name="Shape 8"/>
-          <p:cNvSpPr/>
-          <p:nvPr/>
-        </p:nvSpPr>
-        <p:spPr>
-          <a:xfrm>
-            <a:off x="530352" y="2057400"/>
-            <a:ext cx="5349240" cy="2103120"/>
+      <p:pic>
+        <p:nvPicPr>
+          <p:cNvPr id="10" name="Image 0" descr="/home/claude/w5/교과서_배포/assets/img/11-1-02-one-file.png">    </p:cNvPr>
+          <p:cNvPicPr>
+            <a:picLocks noChangeAspect="1"/>
+          </p:cNvPicPr>
+          <p:nvPr/>
+        </p:nvPicPr>
+        <p:blipFill>
+          <a:blip r:embed="rId1"/>
+          <a:stretch>
+            <a:fillRect/>
+          </a:stretch>
+        </p:blipFill>
+        <p:spPr>
+          <a:xfrm>
+            <a:off x="1053592" y="2011680"/>
+            <a:ext cx="4714240" cy="2651760"/>
+          </a:xfrm>
+          <a:prstGeom prst="rect">
+            <a:avLst/>
+          </a:prstGeom>
+        </p:spPr>
+      </p:pic>
+      <p:sp>
+        <p:nvSpPr>
+          <p:cNvPr id="11" name="Shape 8"/>
+          <p:cNvSpPr/>
+          <p:nvPr/>
+        </p:nvSpPr>
+        <p:spPr>
+          <a:xfrm>
+            <a:off x="6309360" y="2011680"/>
+            <a:ext cx="5349240" cy="1234440"/>
           </a:xfrm>
           <a:prstGeom prst="roundRect">
             <a:avLst>
-              <a:gd name="adj" fmla="val 2391"/>
+              <a:gd name="adj" fmla="val 4074"/>
             </a:avLst>
           </a:prstGeom>
           <a:solidFill>
@@ -5328,13 +5376,13 @@
       </p:sp>
       <p:sp>
         <p:nvSpPr>
-          <p:cNvPr id="11" name="Text 9"/>
-          <p:cNvSpPr/>
-          <p:nvPr/>
-        </p:nvSpPr>
-        <p:spPr>
-          <a:xfrm>
-            <a:off x="713232" y="2221992"/>
+          <p:cNvPr id="12" name="Text 9"/>
+          <p:cNvSpPr/>
+          <p:nvPr/>
+        </p:nvSpPr>
+        <p:spPr>
+          <a:xfrm>
+            <a:off x="6492240" y="2176272"/>
             <a:ext cx="4983480" cy="402336"/>
           </a:xfrm>
           <a:prstGeom prst="rect">
@@ -5367,14 +5415,14 @@
       </p:sp>
       <p:sp>
         <p:nvSpPr>
-          <p:cNvPr id="12" name="Text 10"/>
-          <p:cNvSpPr/>
-          <p:nvPr/>
-        </p:nvSpPr>
-        <p:spPr>
-          <a:xfrm>
-            <a:off x="713232" y="2715768"/>
-            <a:ext cx="4983480" cy="1298448"/>
+          <p:cNvPr id="13" name="Text 10"/>
+          <p:cNvSpPr/>
+          <p:nvPr/>
+        </p:nvSpPr>
+        <p:spPr>
+          <a:xfrm>
+            <a:off x="6492240" y="2670048"/>
+            <a:ext cx="4983480" cy="429768"/>
           </a:xfrm>
           <a:prstGeom prst="rect">
             <a:avLst/>
@@ -5393,7 +5441,7 @@
               <a:buNone/>
             </a:pPr>
             <a:r>
-              <a:rPr lang="en-US" sz="1350" dirty="0">
+              <a:rPr lang="en-US" sz="1250" dirty="0">
                 <a:solidFill>
                   <a:srgbClr val="6C7078"/>
                 </a:solidFill>
@@ -5403,44 +5451,24 @@
               </a:rPr>
               <a:t>표 · 행 · 열 · 기본키 · 외래키</a:t>
             </a:r>
-            <a:endParaRPr lang="en-US" sz="1350" dirty="0"/>
-          </a:p>
-          <a:p>
-            <a:pPr indent="0" marL="0">
-              <a:lnSpc>
-                <a:spcPts val="1900"/>
-              </a:lnSpc>
-              <a:buNone/>
-            </a:pPr>
-            <a:r>
-              <a:rPr lang="en-US" sz="1350" dirty="0">
-                <a:solidFill>
-                  <a:srgbClr val="6C7078"/>
-                </a:solidFill>
-                <a:latin typeface="IBM Plex Sans KR" pitchFamily="34" charset="0"/>
-                <a:ea typeface="IBM Plex Sans KR" pitchFamily="34" charset="-122"/>
-                <a:cs typeface="IBM Plex Sans KR" pitchFamily="34" charset="-120"/>
-              </a:rPr>
-              <a:t>원리는 그대로다.</a:t>
-            </a:r>
-            <a:endParaRPr lang="en-US" sz="1350" dirty="0"/>
-          </a:p>
-        </p:txBody>
-      </p:sp>
-      <p:sp>
-        <p:nvSpPr>
-          <p:cNvPr id="13" name="Shape 11"/>
-          <p:cNvSpPr/>
-          <p:nvPr/>
-        </p:nvSpPr>
-        <p:spPr>
-          <a:xfrm>
-            <a:off x="6309360" y="2057400"/>
-            <a:ext cx="5349240" cy="2103120"/>
+            <a:endParaRPr lang="en-US" sz="1250" dirty="0"/>
+          </a:p>
+        </p:txBody>
+      </p:sp>
+      <p:sp>
+        <p:nvSpPr>
+          <p:cNvPr id="14" name="Shape 11"/>
+          <p:cNvSpPr/>
+          <p:nvPr/>
+        </p:nvSpPr>
+        <p:spPr>
+          <a:xfrm>
+            <a:off x="6309360" y="3364992"/>
+            <a:ext cx="5349240" cy="1298448"/>
           </a:xfrm>
           <a:prstGeom prst="roundRect">
             <a:avLst>
-              <a:gd name="adj" fmla="val 2391"/>
+              <a:gd name="adj" fmla="val 3873"/>
             </a:avLst>
           </a:prstGeom>
           <a:solidFill>
@@ -5456,13 +5484,13 @@
       </p:sp>
       <p:sp>
         <p:nvSpPr>
-          <p:cNvPr id="14" name="Text 12"/>
-          <p:cNvSpPr/>
-          <p:nvPr/>
-        </p:nvSpPr>
-        <p:spPr>
-          <a:xfrm>
-            <a:off x="6492240" y="2221992"/>
+          <p:cNvPr id="15" name="Text 12"/>
+          <p:cNvSpPr/>
+          <p:nvPr/>
+        </p:nvSpPr>
+        <p:spPr>
+          <a:xfrm>
+            <a:off x="6492240" y="3529584"/>
             <a:ext cx="4983480" cy="402336"/>
           </a:xfrm>
           <a:prstGeom prst="rect">
@@ -5487,7 +5515,7 @@
                 <a:ea typeface="IBM Plex Sans KR" pitchFamily="34" charset="-122"/>
                 <a:cs typeface="IBM Plex Sans KR" pitchFamily="34" charset="-120"/>
               </a:rPr>
-              <a:t>다른 점은 어디 있느냐</a:t>
+              <a:t>다른 점</a:t>
             </a:r>
             <a:endParaRPr lang="en-US" sz="1650" dirty="0"/>
           </a:p>
@@ -5495,14 +5523,14 @@
       </p:sp>
       <p:sp>
         <p:nvSpPr>
-          <p:cNvPr id="15" name="Text 13"/>
-          <p:cNvSpPr/>
-          <p:nvPr/>
-        </p:nvSpPr>
-        <p:spPr>
-          <a:xfrm>
-            <a:off x="6492240" y="2715768"/>
-            <a:ext cx="4983480" cy="1298448"/>
+          <p:cNvPr id="16" name="Text 13"/>
+          <p:cNvSpPr/>
+          <p:nvPr/>
+        </p:nvSpPr>
+        <p:spPr>
+          <a:xfrm>
+            <a:off x="6492240" y="4023360"/>
+            <a:ext cx="4983480" cy="493776"/>
           </a:xfrm>
           <a:prstGeom prst="rect">
             <a:avLst/>
@@ -5521,7 +5549,7 @@
               <a:buNone/>
             </a:pPr>
             <a:r>
-              <a:rPr lang="en-US" sz="1350" dirty="0">
+              <a:rPr lang="en-US" sz="1250" dirty="0">
                 <a:solidFill>
                   <a:srgbClr val="34373D"/>
                 </a:solidFill>
@@ -5531,7 +5559,7 @@
               </a:rPr>
               <a:t>외부 서비스에 접속하지 않는다.</a:t>
             </a:r>
-            <a:endParaRPr lang="en-US" sz="1350" dirty="0"/>
+            <a:endParaRPr lang="en-US" sz="1250" dirty="0"/>
           </a:p>
           <a:p>
             <a:pPr indent="0" marL="0">
@@ -5541,7 +5569,7 @@
               <a:buNone/>
             </a:pPr>
             <a:r>
-              <a:rPr lang="en-US" sz="1350" dirty="0">
+              <a:rPr lang="en-US" sz="1250" dirty="0">
                 <a:solidFill>
                   <a:srgbClr val="34373D"/>
                 </a:solidFill>
@@ -5549,26 +5577,26 @@
                 <a:ea typeface="IBM Plex Sans KR" pitchFamily="34" charset="-122"/>
                 <a:cs typeface="IBM Plex Sans KR" pitchFamily="34" charset="-120"/>
               </a:rPr>
-              <a:t>프로젝트 폴더 안의 파일 하나를 쓴다.</a:t>
-            </a:r>
-            <a:endParaRPr lang="en-US" sz="1350" dirty="0"/>
-          </a:p>
-        </p:txBody>
-      </p:sp>
-      <p:sp>
-        <p:nvSpPr>
-          <p:cNvPr id="16" name="Shape 14"/>
-          <p:cNvSpPr/>
-          <p:nvPr/>
-        </p:nvSpPr>
-        <p:spPr>
-          <a:xfrm>
-            <a:off x="530352" y="4343400"/>
-            <a:ext cx="11128248" cy="1005840"/>
+              <a:t>폴더 안의 파일 하나를 쓴다.</a:t>
+            </a:r>
+            <a:endParaRPr lang="en-US" sz="1250" dirty="0"/>
+          </a:p>
+        </p:txBody>
+      </p:sp>
+      <p:sp>
+        <p:nvSpPr>
+          <p:cNvPr id="17" name="Shape 14"/>
+          <p:cNvSpPr/>
+          <p:nvPr/>
+        </p:nvSpPr>
+        <p:spPr>
+          <a:xfrm>
+            <a:off x="530352" y="4800600"/>
+            <a:ext cx="11128248" cy="685800"/>
           </a:xfrm>
           <a:prstGeom prst="roundRect">
             <a:avLst>
-              <a:gd name="adj" fmla="val 4545"/>
+              <a:gd name="adj" fmla="val 6667"/>
             </a:avLst>
           </a:prstGeom>
           <a:solidFill>
@@ -5579,13 +5607,13 @@
       </p:sp>
       <p:sp>
         <p:nvSpPr>
-          <p:cNvPr id="17" name="Text 15"/>
-          <p:cNvSpPr/>
-          <p:nvPr/>
-        </p:nvSpPr>
-        <p:spPr>
-          <a:xfrm>
-            <a:off x="768096" y="4471416"/>
+          <p:cNvPr id="18" name="Text 15"/>
+          <p:cNvSpPr/>
+          <p:nvPr/>
+        </p:nvSpPr>
+        <p:spPr>
+          <a:xfrm>
+            <a:off x="768096" y="4928616"/>
             <a:ext cx="10652760" cy="219456"/>
           </a:xfrm>
           <a:prstGeom prst="rect">
@@ -5618,14 +5646,14 @@
       </p:sp>
       <p:sp>
         <p:nvSpPr>
-          <p:cNvPr id="18" name="Text 16"/>
-          <p:cNvSpPr/>
-          <p:nvPr/>
-        </p:nvSpPr>
-        <p:spPr>
-          <a:xfrm>
-            <a:off x="768096" y="4745736"/>
-            <a:ext cx="10652760" cy="457200"/>
+          <p:cNvPr id="19" name="Text 16"/>
+          <p:cNvSpPr/>
+          <p:nvPr/>
+        </p:nvSpPr>
+        <p:spPr>
+          <a:xfrm>
+            <a:off x="768096" y="5202936"/>
+            <a:ext cx="10652760" cy="137160"/>
           </a:xfrm>
           <a:prstGeom prst="rect">
             <a:avLst/>
@@ -5639,12 +5667,12 @@
           <a:p>
             <a:pPr indent="0" marL="0">
               <a:lnSpc>
-                <a:spcPts val="2550"/>
+                <a:spcPts val="2380"/>
               </a:lnSpc>
               <a:buNone/>
             </a:pPr>
             <a:r>
-              <a:rPr lang="en-US" sz="1500" b="1" dirty="0">
+              <a:rPr lang="en-US" sz="1400" b="1" dirty="0">
                 <a:solidFill>
                   <a:srgbClr val="E8EAED"/>
                 </a:solidFill>
@@ -5654,13 +5682,13 @@
               </a:rPr>
               <a:t>data/ └─ app.db</a:t>
             </a:r>
-            <a:endParaRPr lang="en-US" sz="1500" dirty="0"/>
-          </a:p>
-        </p:txBody>
-      </p:sp>
-      <p:sp>
-        <p:nvSpPr>
-          <p:cNvPr id="19" name="Shape 17"/>
+            <a:endParaRPr lang="en-US" sz="1400" dirty="0"/>
+          </a:p>
+        </p:txBody>
+      </p:sp>
+      <p:sp>
+        <p:nvSpPr>
+          <p:cNvPr id="20" name="Shape 17"/>
           <p:cNvSpPr/>
           <p:nvPr/>
         </p:nvSpPr>
@@ -5687,7 +5715,7 @@
       </p:sp>
       <p:sp>
         <p:nvSpPr>
-          <p:cNvPr id="20" name="Text 18"/>
+          <p:cNvPr id="21" name="Text 18"/>
           <p:cNvSpPr/>
           <p:nvPr/>
         </p:nvSpPr>
